--- a/output/education/archive/2026-03-21_multi-agent-ai-healthcare/multi-agent-ai_slides_residents.pptx
+++ b/output/education/archive/2026-03-21_multi-agent-ai-healthcare/multi-agent-ai_slides_residents.pptx
@@ -3134,6 +3134,7 @@
               </a:defRPr>
             </a:pPr>
             <a:r>
+              <a:rPr/>
               <a:t>AIが病院でどう働くか</a:t>
             </a:r>
           </a:p>
@@ -3170,6 +3171,7 @@
               </a:defRPr>
             </a:pPr>
             <a:r>
+              <a:rPr/>
               <a:t>マルチエージェントAIの医療実証研究 — Mount Sinai論文を読む</a:t>
             </a:r>
           </a:p>
@@ -3214,7 +3216,9 @@
           <a:bodyPr rtlCol="0" anchor="ctr"/>
           <a:lstStyle/>
           <a:p>
-            <a:pPr algn="ctr"/>
+            <a:pPr algn="ctr">
+              <a:defRPr/>
+            </a:pPr>
           </a:p>
         </p:txBody>
       </p:sp>
@@ -3249,6 +3253,7 @@
               </a:defRPr>
             </a:pPr>
             <a:r>
+              <a:rPr/>
               <a:t>研修医・専攻医向け｜30分｜2026-03-21</a:t>
             </a:r>
           </a:p>
@@ -3311,6 +3316,7 @@
               </a:defRPr>
             </a:pPr>
             <a:r>
+              <a:rPr/>
               <a:t>導入の問い</a:t>
             </a:r>
           </a:p>
@@ -3355,7 +3361,9 @@
           <a:bodyPr rtlCol="0" anchor="ctr"/>
           <a:lstStyle/>
           <a:p>
-            <a:pPr algn="ctr"/>
+            <a:pPr algn="ctr">
+              <a:defRPr/>
+            </a:pPr>
           </a:p>
         </p:txBody>
       </p:sp>
@@ -3400,7 +3408,9 @@
           <a:bodyPr rtlCol="0" anchor="ctr"/>
           <a:lstStyle/>
           <a:p>
-            <a:pPr algn="ctr"/>
+            <a:pPr algn="ctr">
+              <a:defRPr/>
+            </a:pPr>
           </a:p>
         </p:txBody>
       </p:sp>
@@ -3435,14 +3445,17 @@
               </a:defRPr>
             </a:pPr>
             <a:r>
+              <a:rPr/>
               <a:t>もし優秀な医師が1人いるのと、</a:t>
             </a:r>
             <a:br/>
             <a:r>
+              <a:rPr/>
               <a:t>それぞれの専門が違う普通の医師が5人いるチームと、</a:t>
             </a:r>
             <a:br/>
             <a:r>
+              <a:rPr/>
               <a:t>どちらに難しい症例を任せたいですか？</a:t>
             </a:r>
           </a:p>
@@ -3457,7 +3470,7 @@
         <p:spPr>
           <a:xfrm>
             <a:off x="731520" y="2103120"/>
-            <a:ext cx="7315200" cy="365760"/>
+            <a:ext cx="7315200" cy="375920"/>
           </a:xfrm>
           <a:prstGeom prst="rect">
             <a:avLst/>
@@ -3479,6 +3492,7 @@
               </a:defRPr>
             </a:pPr>
             <a:r>
+              <a:rPr/>
               <a:t>この30分の後、あなたは：</a:t>
             </a:r>
           </a:p>
@@ -3516,6 +3530,7 @@
               <a:buChar char="●"/>
             </a:pPr>
             <a:r>
+              <a:rPr/>
               <a:t>マルチエージェントAIの基本概念を説明できる（理解）</a:t>
             </a:r>
           </a:p>
@@ -3530,6 +3545,7 @@
               <a:buChar char="●"/>
             </a:pPr>
             <a:r>
+              <a:rPr/>
               <a:t>Mount Sinai研究のStudy Designを批判的に吟味できる（分析）</a:t>
             </a:r>
           </a:p>
@@ -3544,6 +3560,7 @@
               <a:buChar char="●"/>
             </a:pPr>
             <a:r>
+              <a:rPr/>
               <a:t>自分の臨床現場でのAI活用可能性を1つ提案できる（創造）</a:t>
             </a:r>
           </a:p>
@@ -3584,7 +3601,7 @@
         <p:spPr>
           <a:xfrm>
             <a:off x="731520" y="274320"/>
-            <a:ext cx="7315200" cy="457200"/>
+            <a:ext cx="7315200" cy="518159"/>
           </a:xfrm>
           <a:prstGeom prst="rect">
             <a:avLst/>
@@ -3606,6 +3623,7 @@
               </a:defRPr>
             </a:pPr>
             <a:r>
+              <a:rPr/>
               <a:t>医療AIの進化 — 3つの世代</a:t>
             </a:r>
           </a:p>
@@ -3975,7 +3993,9 @@
           <a:bodyPr rtlCol="0" anchor="ctr"/>
           <a:lstStyle/>
           <a:p>
-            <a:pPr algn="ctr"/>
+            <a:pPr algn="ctr">
+              <a:defRPr/>
+            </a:pPr>
           </a:p>
         </p:txBody>
       </p:sp>
@@ -3988,7 +4008,7 @@
         <p:spPr>
           <a:xfrm>
             <a:off x="868680" y="2697480"/>
-            <a:ext cx="4572000" cy="274320"/>
+            <a:ext cx="4572000" cy="322579"/>
           </a:xfrm>
           <a:prstGeom prst="rect">
             <a:avLst/>
@@ -4010,6 +4030,7 @@
               </a:defRPr>
             </a:pPr>
             <a:r>
+              <a:rPr/>
               <a:t>マルチエージェント = チーム医療のAI版</a:t>
             </a:r>
           </a:p>
@@ -4023,7 +4044,7 @@
         </p:nvSpPr>
         <p:spPr>
           <a:xfrm>
-            <a:off x="868680" y="3017520"/>
+            <a:off x="868680" y="3038347"/>
             <a:ext cx="4114800" cy="1554480"/>
           </a:xfrm>
           <a:prstGeom prst="rect">
@@ -4046,22 +4067,27 @@
               </a:defRPr>
             </a:pPr>
             <a:r>
+              <a:rPr/>
               <a:t>  [Supervisor Agent]（総合医）</a:t>
             </a:r>
             <a:br/>
             <a:r>
+              <a:rPr/>
               <a:t>    ├── [Agent A] 検査データ専門</a:t>
             </a:r>
             <a:br/>
             <a:r>
+              <a:rPr/>
               <a:t>    ├── [Agent B] 画像診断専門</a:t>
             </a:r>
             <a:br/>
             <a:r>
+              <a:rPr/>
               <a:t>    ├── [Agent C] 薬剤相互作用専門</a:t>
             </a:r>
             <a:br/>
             <a:r>
+              <a:rPr/>
               <a:t>    └── [Agent D] ガイドライン照合専門</a:t>
             </a:r>
           </a:p>
@@ -4098,14 +4124,17 @@
               </a:defRPr>
             </a:pPr>
             <a:r>
+              <a:rPr/>
               <a:t>チーム医療と同じ構造</a:t>
             </a:r>
             <a:br/>
             <a:r>
+              <a:rPr/>
               <a:t>1人の総合医がすべてやるより</a:t>
             </a:r>
             <a:br/>
             <a:r>
+              <a:rPr/>
               <a:t>専門家チームの方が強い</a:t>
             </a:r>
           </a:p>
@@ -4146,7 +4175,7 @@
         <p:spPr>
           <a:xfrm>
             <a:off x="731520" y="274320"/>
-            <a:ext cx="7315200" cy="457200"/>
+            <a:ext cx="7315200" cy="518159"/>
           </a:xfrm>
           <a:prstGeom prst="rect">
             <a:avLst/>
@@ -4168,6 +4197,7 @@
               </a:defRPr>
             </a:pPr>
             <a:r>
+              <a:rPr/>
               <a:t>Mount Sinai研究の結果</a:t>
             </a:r>
           </a:p>
@@ -4181,8 +4211,8 @@
         </p:nvSpPr>
         <p:spPr>
           <a:xfrm>
-            <a:off x="731520" y="685800"/>
-            <a:ext cx="4572000" cy="274320"/>
+            <a:off x="731520" y="810767"/>
+            <a:ext cx="4572000" cy="287020"/>
           </a:xfrm>
           <a:prstGeom prst="rect">
             <a:avLst/>
@@ -4204,6 +4234,7 @@
               </a:defRPr>
             </a:pPr>
             <a:r>
+              <a:rPr/>
               <a:t>npj Health Systems, 2026</a:t>
             </a:r>
           </a:p>
@@ -4250,7 +4281,9 @@
           <a:bodyPr rtlCol="0" anchor="ctr"/>
           <a:lstStyle/>
           <a:p>
-            <a:pPr algn="ctr"/>
+            <a:pPr algn="ctr">
+              <a:defRPr/>
+            </a:pPr>
           </a:p>
         </p:txBody>
       </p:sp>
@@ -4293,7 +4326,9 @@
           <a:bodyPr rtlCol="0" anchor="ctr"/>
           <a:lstStyle/>
           <a:p>
-            <a:pPr algn="ctr"/>
+            <a:pPr algn="ctr">
+              <a:defRPr/>
+            </a:pPr>
           </a:p>
         </p:txBody>
       </p:sp>
@@ -4306,7 +4341,7 @@
         <p:spPr>
           <a:xfrm>
             <a:off x="868680" y="1143000"/>
-            <a:ext cx="2286000" cy="274320"/>
+            <a:ext cx="2286000" cy="304799"/>
           </a:xfrm>
           <a:prstGeom prst="rect">
             <a:avLst/>
@@ -4328,6 +4363,7 @@
               </a:defRPr>
             </a:pPr>
             <a:r>
+              <a:rPr/>
               <a:t>精度</a:t>
             </a:r>
           </a:p>
@@ -4341,7 +4377,7 @@
         </p:nvSpPr>
         <p:spPr>
           <a:xfrm>
-            <a:off x="868680" y="1371600"/>
+            <a:off x="868680" y="1466087"/>
             <a:ext cx="2286000" cy="731520"/>
           </a:xfrm>
           <a:prstGeom prst="rect">
@@ -4364,10 +4400,12 @@
               </a:defRPr>
             </a:pPr>
             <a:r>
+              <a:rPr/>
               <a:t>有意に</a:t>
             </a:r>
             <a:br/>
             <a:r>
+              <a:rPr/>
               <a:t>上回る</a:t>
             </a:r>
           </a:p>
@@ -4381,7 +4419,7 @@
         </p:nvSpPr>
         <p:spPr>
           <a:xfrm>
-            <a:off x="868680" y="2148840"/>
+            <a:off x="868680" y="2215895"/>
             <a:ext cx="2286000" cy="548640"/>
           </a:xfrm>
           <a:prstGeom prst="rect">
@@ -4404,10 +4442,12 @@
               </a:defRPr>
             </a:pPr>
             <a:r>
+              <a:rPr/>
               <a:t>特に複雑な</a:t>
             </a:r>
             <a:br/>
             <a:r>
+              <a:rPr/>
               <a:t>医療タスクで顕著</a:t>
             </a:r>
           </a:p>
@@ -4454,7 +4494,9 @@
           <a:bodyPr rtlCol="0" anchor="ctr"/>
           <a:lstStyle/>
           <a:p>
-            <a:pPr algn="ctr"/>
+            <a:pPr algn="ctr">
+              <a:defRPr/>
+            </a:pPr>
           </a:p>
         </p:txBody>
       </p:sp>
@@ -4497,7 +4539,9 @@
           <a:bodyPr rtlCol="0" anchor="ctr"/>
           <a:lstStyle/>
           <a:p>
-            <a:pPr algn="ctr"/>
+            <a:pPr algn="ctr">
+              <a:defRPr/>
+            </a:pPr>
           </a:p>
         </p:txBody>
       </p:sp>
@@ -4510,7 +4554,7 @@
         <p:spPr>
           <a:xfrm>
             <a:off x="3657599" y="1143000"/>
-            <a:ext cx="2286000" cy="274320"/>
+            <a:ext cx="2286000" cy="304799"/>
           </a:xfrm>
           <a:prstGeom prst="rect">
             <a:avLst/>
@@ -4532,6 +4576,7 @@
               </a:defRPr>
             </a:pPr>
             <a:r>
+              <a:rPr/>
               <a:t>コスト</a:t>
             </a:r>
           </a:p>
@@ -4545,7 +4590,7 @@
         </p:nvSpPr>
         <p:spPr>
           <a:xfrm>
-            <a:off x="3657599" y="1371600"/>
+            <a:off x="3657599" y="1466087"/>
             <a:ext cx="2286000" cy="731520"/>
           </a:xfrm>
           <a:prstGeom prst="rect">
@@ -4568,6 +4613,7 @@
               </a:defRPr>
             </a:pPr>
             <a:r>
+              <a:rPr/>
               <a:t>65分の1</a:t>
             </a:r>
           </a:p>
@@ -4581,7 +4627,7 @@
         </p:nvSpPr>
         <p:spPr>
           <a:xfrm>
-            <a:off x="3657599" y="2148840"/>
+            <a:off x="3657599" y="2215895"/>
             <a:ext cx="2286000" cy="548640"/>
           </a:xfrm>
           <a:prstGeom prst="rect">
@@ -4604,10 +4650,12 @@
               </a:defRPr>
             </a:pPr>
             <a:r>
+              <a:rPr/>
               <a:t>計算コストを</a:t>
             </a:r>
             <a:br/>
             <a:r>
+              <a:rPr/>
               <a:t>大幅削減</a:t>
             </a:r>
           </a:p>
@@ -4654,7 +4702,9 @@
           <a:bodyPr rtlCol="0" anchor="ctr"/>
           <a:lstStyle/>
           <a:p>
-            <a:pPr algn="ctr"/>
+            <a:pPr algn="ctr">
+              <a:defRPr/>
+            </a:pPr>
           </a:p>
         </p:txBody>
       </p:sp>
@@ -4697,7 +4747,9 @@
           <a:bodyPr rtlCol="0" anchor="ctr"/>
           <a:lstStyle/>
           <a:p>
-            <a:pPr algn="ctr"/>
+            <a:pPr algn="ctr">
+              <a:defRPr/>
+            </a:pPr>
           </a:p>
         </p:txBody>
       </p:sp>
@@ -4710,7 +4762,7 @@
         <p:spPr>
           <a:xfrm>
             <a:off x="6446520" y="1143000"/>
-            <a:ext cx="2286000" cy="274320"/>
+            <a:ext cx="2286000" cy="304799"/>
           </a:xfrm>
           <a:prstGeom prst="rect">
             <a:avLst/>
@@ -4732,6 +4784,7 @@
               </a:defRPr>
             </a:pPr>
             <a:r>
+              <a:rPr/>
               <a:t>スケール</a:t>
             </a:r>
           </a:p>
@@ -4745,7 +4798,7 @@
         </p:nvSpPr>
         <p:spPr>
           <a:xfrm>
-            <a:off x="6446520" y="1371600"/>
+            <a:off x="6446520" y="1466087"/>
             <a:ext cx="2286000" cy="731520"/>
           </a:xfrm>
           <a:prstGeom prst="rect">
@@ -4768,10 +4821,12 @@
               </a:defRPr>
             </a:pPr>
             <a:r>
+              <a:rPr/>
               <a:t>性能</a:t>
             </a:r>
             <a:br/>
             <a:r>
+              <a:rPr/>
               <a:t>維持</a:t>
             </a:r>
           </a:p>
@@ -4785,7 +4840,7 @@
         </p:nvSpPr>
         <p:spPr>
           <a:xfrm>
-            <a:off x="6446520" y="2148840"/>
+            <a:off x="6446520" y="2215895"/>
             <a:ext cx="2286000" cy="548640"/>
           </a:xfrm>
           <a:prstGeom prst="rect">
@@ -4808,10 +4863,12 @@
               </a:defRPr>
             </a:pPr>
             <a:r>
+              <a:rPr/>
               <a:t>タスク増加でも</a:t>
             </a:r>
             <a:br/>
             <a:r>
+              <a:rPr/>
               <a:t>品質低下なし</a:t>
             </a:r>
           </a:p>
@@ -4856,7 +4913,9 @@
           <a:bodyPr rtlCol="0" anchor="ctr"/>
           <a:lstStyle/>
           <a:p>
-            <a:pPr algn="ctr"/>
+            <a:pPr algn="ctr">
+              <a:defRPr/>
+            </a:pPr>
           </a:p>
         </p:txBody>
       </p:sp>
@@ -4901,7 +4960,9 @@
           <a:bodyPr rtlCol="0" anchor="ctr"/>
           <a:lstStyle/>
           <a:p>
-            <a:pPr algn="ctr"/>
+            <a:pPr algn="ctr">
+              <a:defRPr/>
+            </a:pPr>
           </a:p>
         </p:txBody>
       </p:sp>
@@ -4936,6 +4997,7 @@
               </a:defRPr>
             </a:pPr>
             <a:r>
+              <a:rPr/>
               <a:t>救急外来で10人同時搬送：スーパードクター1人 → 限界 ／ 専門チーム5人 → 並列処理＋専門性</a:t>
             </a:r>
           </a:p>
@@ -4976,7 +5038,7 @@
         <p:spPr>
           <a:xfrm>
             <a:off x="731520" y="274320"/>
-            <a:ext cx="7315200" cy="457200"/>
+            <a:ext cx="7315200" cy="518159"/>
           </a:xfrm>
           <a:prstGeom prst="rect">
             <a:avLst/>
@@ -4998,6 +5060,7 @@
               </a:defRPr>
             </a:pPr>
             <a:r>
+              <a:rPr/>
               <a:t>批判的吟味</a:t>
             </a:r>
           </a:p>
@@ -5483,7 +5546,7 @@
         <p:spPr>
           <a:xfrm>
             <a:off x="731520" y="2926080"/>
-            <a:ext cx="2743200" cy="274320"/>
+            <a:ext cx="2743200" cy="322579"/>
           </a:xfrm>
           <a:prstGeom prst="rect">
             <a:avLst/>
@@ -5505,6 +5568,7 @@
               </a:defRPr>
             </a:pPr>
             <a:r>
+              <a:rPr/>
               <a:t>考えるべき問い</a:t>
             </a:r>
           </a:p>
@@ -5518,7 +5582,7 @@
         </p:nvSpPr>
         <p:spPr>
           <a:xfrm>
-            <a:off x="731520" y="3246120"/>
+            <a:off x="731520" y="3266947"/>
             <a:ext cx="7680960" cy="1645920"/>
           </a:xfrm>
           <a:prstGeom prst="rect">
@@ -5542,6 +5606,7 @@
               <a:buChar char="●"/>
             </a:pPr>
             <a:r>
+              <a:rPr/>
               <a:t>65倍のコスト削減 — 比較対象は公平か？</a:t>
             </a:r>
           </a:p>
@@ -5556,6 +5621,7 @@
               <a:buChar char="●"/>
             </a:pPr>
             <a:r>
+              <a:rPr/>
               <a:t>統計的有意 ≠ 臨床的有意</a:t>
             </a:r>
           </a:p>
@@ -5570,6 +5636,7 @@
               <a:buChar char="●"/>
             </a:pPr>
             <a:r>
+              <a:rPr/>
               <a:t>エージェント誤判断時の安全装置は？</a:t>
             </a:r>
           </a:p>
@@ -5584,6 +5651,7 @@
               <a:buChar char="●"/>
             </a:pPr>
             <a:r>
+              <a:rPr/>
               <a:t>日本の医療にそのまま適用できるか？</a:t>
             </a:r>
           </a:p>
@@ -5624,7 +5692,7 @@
         <p:spPr>
           <a:xfrm>
             <a:off x="731520" y="274320"/>
-            <a:ext cx="7315200" cy="457200"/>
+            <a:ext cx="7315200" cy="589279"/>
           </a:xfrm>
           <a:prstGeom prst="rect">
             <a:avLst/>
@@ -5646,6 +5714,7 @@
               </a:defRPr>
             </a:pPr>
             <a:r>
+              <a:rPr/>
               <a:t>ペアディスカッション</a:t>
             </a:r>
           </a:p>
@@ -5659,8 +5728,8 @@
         </p:nvSpPr>
         <p:spPr>
           <a:xfrm>
-            <a:off x="731520" y="731520"/>
-            <a:ext cx="2743200" cy="320040"/>
+            <a:off x="731520" y="881887"/>
+            <a:ext cx="2743200" cy="340360"/>
           </a:xfrm>
           <a:prstGeom prst="rect">
             <a:avLst/>
@@ -5682,6 +5751,7 @@
               </a:defRPr>
             </a:pPr>
             <a:r>
+              <a:rPr/>
               <a:t>4分間 → 全体共有 2分</a:t>
             </a:r>
           </a:p>
@@ -5726,7 +5796,9 @@
           <a:bodyPr rtlCol="0" anchor="ctr"/>
           <a:lstStyle/>
           <a:p>
-            <a:pPr algn="ctr"/>
+            <a:pPr algn="ctr">
+              <a:defRPr/>
+            </a:pPr>
           </a:p>
         </p:txBody>
       </p:sp>
@@ -5771,7 +5843,9 @@
           <a:bodyPr rtlCol="0" anchor="ctr"/>
           <a:lstStyle/>
           <a:p>
-            <a:pPr algn="ctr"/>
+            <a:pPr algn="ctr">
+              <a:defRPr/>
+            </a:pPr>
           </a:p>
         </p:txBody>
       </p:sp>
@@ -5806,18 +5880,22 @@
               </a:defRPr>
             </a:pPr>
             <a:r>
+              <a:rPr/>
               <a:t>あなたの臨床現場（外来・病棟・救急）で、</a:t>
             </a:r>
             <a:br/>
             <a:r>
+              <a:rPr/>
               <a:t>マルチエージェントAIが活躍できそうな場面を</a:t>
             </a:r>
             <a:br/>
             <a:r>
+              <a:rPr/>
               <a:t>1つ考えてください。</a:t>
             </a:r>
             <a:br/>
             <a:r>
+              <a:rPr/>
               <a:t>どんな「専門エージェント」が必要ですか？</a:t>
             </a:r>
           </a:p>
@@ -5832,7 +5910,7 @@
         <p:spPr>
           <a:xfrm>
             <a:off x="731520" y="2606040"/>
-            <a:ext cx="2743200" cy="274320"/>
+            <a:ext cx="2743200" cy="340360"/>
           </a:xfrm>
           <a:prstGeom prst="rect">
             <a:avLst/>
@@ -5854,6 +5932,7 @@
               </a:defRPr>
             </a:pPr>
             <a:r>
+              <a:rPr/>
               <a:t>考えるヒント</a:t>
             </a:r>
           </a:p>
@@ -5867,7 +5946,7 @@
         </p:nvSpPr>
         <p:spPr>
           <a:xfrm>
-            <a:off x="731520" y="2926080"/>
+            <a:off x="731520" y="2964688"/>
             <a:ext cx="7680960" cy="1371600"/>
           </a:xfrm>
           <a:prstGeom prst="rect">
@@ -5891,6 +5970,7 @@
               <a:buChar char="●"/>
             </a:pPr>
             <a:r>
+              <a:rPr/>
               <a:t>複数の情報源を同時に確認する場面は？</a:t>
             </a:r>
           </a:p>
@@ -5905,6 +5985,7 @@
               <a:buChar char="●"/>
             </a:pPr>
             <a:r>
+              <a:rPr/>
               <a:t>「誰かに自動チェックしてほしい」業務は？</a:t>
             </a:r>
           </a:p>
@@ -5919,6 +6000,7 @@
               <a:buChar char="●"/>
             </a:pPr>
             <a:r>
+              <a:rPr/>
               <a:t>カンファレンスの事前準備を効率化するなら？</a:t>
             </a:r>
           </a:p>
@@ -5959,7 +6041,7 @@
         <p:spPr>
           <a:xfrm>
             <a:off x="731520" y="274320"/>
-            <a:ext cx="7315200" cy="457200"/>
+            <a:ext cx="7315200" cy="518159"/>
           </a:xfrm>
           <a:prstGeom prst="rect">
             <a:avLst/>
@@ -5981,6 +6063,7 @@
               </a:defRPr>
             </a:pPr>
             <a:r>
+              <a:rPr/>
               <a:t>業界トレンド</a:t>
             </a:r>
           </a:p>
@@ -6025,7 +6108,9 @@
           <a:bodyPr rtlCol="0" anchor="ctr"/>
           <a:lstStyle/>
           <a:p>
-            <a:pPr algn="ctr"/>
+            <a:pPr algn="ctr">
+              <a:defRPr/>
+            </a:pPr>
           </a:p>
         </p:txBody>
       </p:sp>
@@ -6038,7 +6123,7 @@
         <p:spPr>
           <a:xfrm>
             <a:off x="822960" y="868680"/>
-            <a:ext cx="2377440" cy="502920"/>
+            <a:ext cx="2377440" cy="518159"/>
           </a:xfrm>
           <a:prstGeom prst="rect">
             <a:avLst/>
@@ -6060,6 +6145,7 @@
               </a:defRPr>
             </a:pPr>
             <a:r>
+              <a:rPr/>
               <a:t>1,445%</a:t>
             </a:r>
           </a:p>
@@ -6073,7 +6159,7 @@
         </p:nvSpPr>
         <p:spPr>
           <a:xfrm>
-            <a:off x="822960" y="1371600"/>
+            <a:off x="822960" y="1405127"/>
             <a:ext cx="2377440" cy="365760"/>
           </a:xfrm>
           <a:prstGeom prst="rect">
@@ -6096,10 +6182,12 @@
               </a:defRPr>
             </a:pPr>
             <a:r>
+              <a:rPr/>
               <a:t>問い合わせ急増</a:t>
             </a:r>
             <a:br/>
             <a:r>
+              <a:rPr/>
               <a:t>(Gartner)</a:t>
             </a:r>
           </a:p>
@@ -6144,7 +6232,9 @@
           <a:bodyPr rtlCol="0" anchor="ctr"/>
           <a:lstStyle/>
           <a:p>
-            <a:pPr algn="ctr"/>
+            <a:pPr algn="ctr">
+              <a:defRPr/>
+            </a:pPr>
           </a:p>
         </p:txBody>
       </p:sp>
@@ -6157,7 +6247,7 @@
         <p:spPr>
           <a:xfrm>
             <a:off x="3611879" y="868680"/>
-            <a:ext cx="2377440" cy="502920"/>
+            <a:ext cx="2377440" cy="518159"/>
           </a:xfrm>
           <a:prstGeom prst="rect">
             <a:avLst/>
@@ -6179,6 +6269,7 @@
               </a:defRPr>
             </a:pPr>
             <a:r>
+              <a:rPr/>
               <a:t>3倍</a:t>
             </a:r>
           </a:p>
@@ -6192,7 +6283,7 @@
         </p:nvSpPr>
         <p:spPr>
           <a:xfrm>
-            <a:off x="3611879" y="1371600"/>
+            <a:off x="3611879" y="1405127"/>
             <a:ext cx="2377440" cy="365760"/>
           </a:xfrm>
           <a:prstGeom prst="rect">
@@ -6215,6 +6306,7 @@
               </a:defRPr>
             </a:pPr>
             <a:r>
+              <a:rPr/>
               <a:t>タスク完了速度</a:t>
             </a:r>
           </a:p>
@@ -6259,7 +6351,9 @@
           <a:bodyPr rtlCol="0" anchor="ctr"/>
           <a:lstStyle/>
           <a:p>
-            <a:pPr algn="ctr"/>
+            <a:pPr algn="ctr">
+              <a:defRPr/>
+            </a:pPr>
           </a:p>
         </p:txBody>
       </p:sp>
@@ -6272,7 +6366,7 @@
         <p:spPr>
           <a:xfrm>
             <a:off x="6400799" y="868680"/>
-            <a:ext cx="2377440" cy="502920"/>
+            <a:ext cx="2377440" cy="518159"/>
           </a:xfrm>
           <a:prstGeom prst="rect">
             <a:avLst/>
@@ -6294,6 +6388,7 @@
               </a:defRPr>
             </a:pPr>
             <a:r>
+              <a:rPr/>
               <a:t>60%↑</a:t>
             </a:r>
           </a:p>
@@ -6307,7 +6402,7 @@
         </p:nvSpPr>
         <p:spPr>
           <a:xfrm>
-            <a:off x="6400799" y="1371600"/>
+            <a:off x="6400799" y="1405127"/>
             <a:ext cx="2377440" cy="365760"/>
           </a:xfrm>
           <a:prstGeom prst="rect">
@@ -6330,6 +6425,7 @@
               </a:defRPr>
             </a:pPr>
             <a:r>
+              <a:rPr/>
               <a:t>精度向上</a:t>
             </a:r>
           </a:p>
@@ -6542,6 +6638,7 @@
               </a:defRPr>
             </a:pPr>
             <a:r>
+              <a:rPr/>
               <a:t>「人間がチェックしなくてもいいAI」は、医療でどこまで許されるか？</a:t>
             </a:r>
           </a:p>
@@ -6582,7 +6679,7 @@
         <p:spPr>
           <a:xfrm>
             <a:off x="731520" y="457200"/>
-            <a:ext cx="7315200" cy="457200"/>
+            <a:ext cx="7315200" cy="518159"/>
           </a:xfrm>
           <a:prstGeom prst="rect">
             <a:avLst/>
@@ -6604,6 +6701,7 @@
               </a:defRPr>
             </a:pPr>
             <a:r>
+              <a:rPr/>
               <a:t>持ち帰りの問い</a:t>
             </a:r>
           </a:p>
@@ -6618,7 +6716,7 @@
         <p:spPr>
           <a:xfrm>
             <a:off x="731520" y="1097280"/>
-            <a:ext cx="2743200" cy="274320"/>
+            <a:ext cx="2743200" cy="340360"/>
           </a:xfrm>
           <a:prstGeom prst="rect">
             <a:avLst/>
@@ -6640,6 +6738,7 @@
               </a:defRPr>
             </a:pPr>
             <a:r>
+              <a:rPr/>
               <a:t>来週の1アクション</a:t>
             </a:r>
           </a:p>
@@ -6653,7 +6752,7 @@
         </p:nvSpPr>
         <p:spPr>
           <a:xfrm>
-            <a:off x="731520" y="1417320"/>
+            <a:off x="731520" y="1455928"/>
             <a:ext cx="7680960" cy="1097280"/>
           </a:xfrm>
           <a:prstGeom prst="rect">
@@ -6677,6 +6776,7 @@
               <a:buChar char="●"/>
             </a:pPr>
             <a:r>
+              <a:rPr/>
               <a:t>自分の業務で「複数情報を同時確認する場面」を1つメモ</a:t>
             </a:r>
           </a:p>
@@ -6691,6 +6791,7 @@
               <a:buChar char="●"/>
             </a:pPr>
             <a:r>
+              <a:rPr/>
               <a:t>同僚と「AIに任せたい業務」について1回話す</a:t>
             </a:r>
           </a:p>
@@ -6705,6 +6806,7 @@
               <a:buChar char="●"/>
             </a:pPr>
             <a:r>
+              <a:rPr/>
               <a:t>Mount Sinai論文のAbstractを読んでみる</a:t>
             </a:r>
           </a:p>
@@ -6749,7 +6851,9 @@
           <a:bodyPr rtlCol="0" anchor="ctr"/>
           <a:lstStyle/>
           <a:p>
-            <a:pPr algn="ctr"/>
+            <a:pPr algn="ctr">
+              <a:defRPr/>
+            </a:pPr>
           </a:p>
         </p:txBody>
       </p:sp>
@@ -6784,15 +6888,18 @@
               </a:defRPr>
             </a:pPr>
             <a:r>
+              <a:rPr/>
               <a:t>チーム医療では「誰が最終責任を負うか」が明確です。</a:t>
             </a:r>
             <a:br/>
             <a:r>
+              <a:rPr/>
               <a:t>マルチエージェントAIでは、誰が責任を負うのでしょうか？</a:t>
             </a:r>
             <a:br/>
             <a:br/>
             <a:r>
+              <a:rPr/>
               <a:t>— この問いは、AIの技術問題ではなく、医療倫理の問題です。</a:t>
             </a:r>
           </a:p>
